--- a/slide/themes/src/13_alliance.pptx
+++ b/slide/themes/src/13_alliance.pptx
@@ -6627,9 +6627,6 @@
                     <a:lumOff val="40000"/>
                   </a:schemeClr>
                 </a:solidFill>
-                <a:latin typeface="Verdana"/>
-                <a:ea typeface="Verdana"/>
-                <a:cs typeface="Verdana"/>
               </a:defRPr>
             </a:lvl1pPr>
             <a:lvl2pPr>
@@ -6640,9 +6637,6 @@
                     <a:lumOff val="40000"/>
                   </a:schemeClr>
                 </a:solidFill>
-                <a:latin typeface="Verdana"/>
-                <a:ea typeface="Verdana"/>
-                <a:cs typeface="Verdana"/>
               </a:defRPr>
             </a:lvl2pPr>
             <a:lvl3pPr>
@@ -6653,9 +6647,6 @@
                     <a:lumOff val="40000"/>
                   </a:schemeClr>
                 </a:solidFill>
-                <a:latin typeface="Verdana"/>
-                <a:ea typeface="Verdana"/>
-                <a:cs typeface="Verdana"/>
               </a:defRPr>
             </a:lvl3pPr>
             <a:lvl4pPr>
@@ -6666,9 +6657,6 @@
                     <a:lumOff val="40000"/>
                   </a:schemeClr>
                 </a:solidFill>
-                <a:latin typeface="Verdana"/>
-                <a:ea typeface="Verdana"/>
-                <a:cs typeface="Verdana"/>
               </a:defRPr>
             </a:lvl4pPr>
             <a:lvl5pPr>
@@ -6679,9 +6667,6 @@
                     <a:lumOff val="40000"/>
                   </a:schemeClr>
                 </a:solidFill>
-                <a:latin typeface="Verdana"/>
-                <a:ea typeface="Verdana"/>
-                <a:cs typeface="Verdana"/>
               </a:defRPr>
             </a:lvl5pPr>
             <a:lvl6pPr>
@@ -6692,9 +6677,6 @@
                     <a:lumOff val="40000"/>
                   </a:schemeClr>
                 </a:solidFill>
-                <a:latin typeface="Verdana"/>
-                <a:ea typeface="Verdana"/>
-                <a:cs typeface="Verdana"/>
               </a:defRPr>
             </a:lvl6pPr>
             <a:lvl7pPr>
@@ -6705,9 +6687,6 @@
                     <a:lumOff val="40000"/>
                   </a:schemeClr>
                 </a:solidFill>
-                <a:latin typeface="Verdana"/>
-                <a:ea typeface="Verdana"/>
-                <a:cs typeface="Verdana"/>
               </a:defRPr>
             </a:lvl7pPr>
             <a:lvl8pPr>
@@ -6718,9 +6697,6 @@
                     <a:lumOff val="40000"/>
                   </a:schemeClr>
                 </a:solidFill>
-                <a:latin typeface="Verdana"/>
-                <a:ea typeface="Verdana"/>
-                <a:cs typeface="Verdana"/>
               </a:defRPr>
             </a:lvl8pPr>
             <a:lvl9pPr>
@@ -6731,9 +6707,6 @@
                     <a:lumOff val="40000"/>
                   </a:schemeClr>
                 </a:solidFill>
-                <a:latin typeface="Verdana"/>
-                <a:ea typeface="Verdana"/>
-                <a:cs typeface="Verdana"/>
               </a:defRPr>
             </a:lvl9pPr>
           </a:lstStyle>
@@ -6779,9 +6752,6 @@
                 <a:solidFill>
                   <a:schemeClr val="bg1"/>
                 </a:solidFill>
-                <a:latin typeface="Verdana"/>
-                <a:ea typeface="Verdana"/>
-                <a:cs typeface="Verdana"/>
               </a:defRPr>
             </a:lvl1pPr>
             <a:lvl2pPr>
@@ -6790,9 +6760,6 @@
                 <a:solidFill>
                   <a:schemeClr val="bg1"/>
                 </a:solidFill>
-                <a:latin typeface="Verdana"/>
-                <a:ea typeface="Verdana"/>
-                <a:cs typeface="Verdana"/>
               </a:defRPr>
             </a:lvl2pPr>
             <a:lvl3pPr>
@@ -6801,9 +6768,6 @@
                 <a:solidFill>
                   <a:schemeClr val="bg1"/>
                 </a:solidFill>
-                <a:latin typeface="Verdana"/>
-                <a:ea typeface="Verdana"/>
-                <a:cs typeface="Verdana"/>
               </a:defRPr>
             </a:lvl3pPr>
             <a:lvl4pPr>
@@ -6812,9 +6776,6 @@
                 <a:solidFill>
                   <a:schemeClr val="bg1"/>
                 </a:solidFill>
-                <a:latin typeface="Verdana"/>
-                <a:ea typeface="Verdana"/>
-                <a:cs typeface="Verdana"/>
               </a:defRPr>
             </a:lvl4pPr>
             <a:lvl5pPr>
@@ -6823,9 +6784,6 @@
                 <a:solidFill>
                   <a:schemeClr val="bg1"/>
                 </a:solidFill>
-                <a:latin typeface="Verdana"/>
-                <a:ea typeface="Verdana"/>
-                <a:cs typeface="Verdana"/>
               </a:defRPr>
             </a:lvl5pPr>
             <a:lvl6pPr>
@@ -6834,9 +6792,6 @@
                 <a:solidFill>
                   <a:schemeClr val="bg1"/>
                 </a:solidFill>
-                <a:latin typeface="Verdana"/>
-                <a:ea typeface="Verdana"/>
-                <a:cs typeface="Verdana"/>
               </a:defRPr>
             </a:lvl6pPr>
             <a:lvl7pPr>
@@ -6845,9 +6800,6 @@
                 <a:solidFill>
                   <a:schemeClr val="bg1"/>
                 </a:solidFill>
-                <a:latin typeface="Verdana"/>
-                <a:ea typeface="Verdana"/>
-                <a:cs typeface="Verdana"/>
               </a:defRPr>
             </a:lvl7pPr>
             <a:lvl8pPr>
@@ -6856,9 +6808,6 @@
                 <a:solidFill>
                   <a:schemeClr val="bg1"/>
                 </a:solidFill>
-                <a:latin typeface="Verdana"/>
-                <a:ea typeface="Verdana"/>
-                <a:cs typeface="Verdana"/>
               </a:defRPr>
             </a:lvl8pPr>
             <a:lvl9pPr>
@@ -6867,9 +6816,6 @@
                 <a:solidFill>
                   <a:schemeClr val="bg1"/>
                 </a:solidFill>
-                <a:latin typeface="Verdana"/>
-                <a:ea typeface="Verdana"/>
-                <a:cs typeface="Verdana"/>
               </a:defRPr>
             </a:lvl9pPr>
           </a:lstStyle>
@@ -7485,14 +7431,14 @@
     </a:clrScheme>
     <a:fontScheme name="Office Theme">
       <a:majorFont>
-        <a:latin typeface="Arial"/>
-        <a:ea typeface="SimSun"/>
-        <a:cs typeface="Arial"/>
+        <a:latin typeface="Verdana"/>
+        <a:ea typeface="Microsoft YaHei"/>
+        <a:cs typeface="Tahoma"/>
       </a:majorFont>
       <a:minorFont>
-        <a:latin typeface="Arial"/>
-        <a:ea typeface="SimSun"/>
-        <a:cs typeface="Arial"/>
+        <a:latin typeface="Verdana"/>
+        <a:ea typeface="Microsoft YaHei"/>
+        <a:cs typeface="Tahoma"/>
       </a:minorFont>
     </a:fontScheme>
     <a:fmtScheme name="Office Theme">
@@ -7722,14 +7668,14 @@
     </a:clrScheme>
     <a:fontScheme name="Arial">
       <a:majorFont>
-        <a:latin typeface="Arial"/>
-        <a:ea typeface="Arial"/>
-        <a:cs typeface="Arial"/>
+        <a:latin typeface="Verdana"/>
+        <a:ea typeface="Microsoft YaHei"/>
+        <a:cs typeface="Tahoma"/>
       </a:majorFont>
       <a:minorFont>
-        <a:latin typeface="Arial"/>
-        <a:ea typeface="Arial"/>
-        <a:cs typeface="Arial"/>
+        <a:latin typeface="Verdana"/>
+        <a:ea typeface="Microsoft YaHei"/>
+        <a:cs typeface="Tahoma"/>
       </a:minorFont>
     </a:fontScheme>
     <a:fmtScheme name="Office">

--- a/slide/themes/src/13_alliance.pptx
+++ b/slide/themes/src/13_alliance.pptx
@@ -536,10 +536,7 @@
             <a:pPr>
               <a:defRPr/>
             </a:pPr>
-            <a:endParaRPr lang="en-US">
-              <a:latin typeface="Arial"/>
-              <a:cs typeface="Arial"/>
-            </a:endParaRPr>
+            <a:endParaRPr lang="en-US"/>
           </a:p>
         </p:txBody>
       </p:sp>
